--- a/RBM.pptx
+++ b/RBM.pptx
@@ -241,6 +241,11 @@
       </a:defRPr>
     </a:lvl9pPr>
   </p:defaultTextStyle>
+  <p:extLst>
+    <p:ext uri="{EFAFB233-063F-42B5-8137-9DF3F51BA10A}">
+      <p15:sldGuideLst xmlns:p15="http://schemas.microsoft.com/office/powerpoint/2012/main"/>
+    </p:ext>
+  </p:extLst>
 </p:presentation>
 </file>
 
@@ -15700,8 +15705,8 @@
         </p:blipFill>
         <p:spPr>
           <a:xfrm>
-            <a:off x="3899305" y="921554"/>
-            <a:ext cx="2578100" cy="1422400"/>
+            <a:off x="4673227" y="818983"/>
+            <a:ext cx="2100729" cy="1159023"/>
           </a:xfrm>
           <a:prstGeom prst="rect">
             <a:avLst/>
@@ -15916,7 +15921,7 @@
               <a:buNone/>
             </a:pPr>
             <a:r>
-              <a:rPr lang="en-US" sz="1800">
+              <a:rPr lang="en-US" sz="1800" dirty="0">
                 <a:solidFill>
                   <a:schemeClr val="dk1"/>
                 </a:solidFill>
@@ -15927,7 +15932,7 @@
               </a:rPr>
               <a:t>Ludwig Boltzmann (1844-1906) Austrian physicist, developer of statistical mechanics.</a:t>
             </a:r>
-            <a:endParaRPr sz="1800">
+            <a:endParaRPr sz="1800" dirty="0">
               <a:solidFill>
                 <a:schemeClr val="dk1"/>
               </a:solidFill>
@@ -15947,8 +15952,8 @@
         </p:nvSpPr>
         <p:spPr>
           <a:xfrm>
-            <a:off x="77321" y="3046198"/>
-            <a:ext cx="4464424" cy="646331"/>
+            <a:off x="0" y="3714745"/>
+            <a:ext cx="2472144" cy="862544"/>
           </a:xfrm>
           <a:prstGeom prst="rect">
             <a:avLst/>
@@ -15974,7 +15979,7 @@
               <a:buNone/>
             </a:pPr>
             <a:r>
-              <a:rPr lang="en-US" sz="1800" b="0" u="none">
+              <a:rPr lang="en-US" sz="1800" b="0" u="none" dirty="0">
                 <a:solidFill>
                   <a:schemeClr val="dk1"/>
                 </a:solidFill>
@@ -15983,9 +15988,8 @@
                 <a:cs typeface="Calibri"/>
                 <a:sym typeface="Calibri"/>
               </a:rPr>
-              <a:t>Josiah Willard Gibbs (1839-1903)</a:t>
+              <a:t>Josiah Willard Gibbs </a:t>
             </a:r>
-            <a:endParaRPr/>
           </a:p>
           <a:p>
             <a:pPr marL="0" marR="0" lvl="0" indent="0" algn="l" rtl="0">
@@ -15998,7 +16002,7 @@
               <a:buNone/>
             </a:pPr>
             <a:r>
-              <a:rPr lang="en-US" sz="1800" b="0" u="none">
+              <a:rPr lang="en-US" sz="1600" b="0" u="none" dirty="0">
                 <a:solidFill>
                   <a:schemeClr val="dk1"/>
                 </a:solidFill>
@@ -16007,9 +16011,32 @@
                 <a:cs typeface="Calibri"/>
                 <a:sym typeface="Calibri"/>
               </a:rPr>
-              <a:t>(statistical mechanics)</a:t>
+              <a:t>1839-1903,New Haven, CT</a:t>
             </a:r>
-            <a:endParaRPr/>
+          </a:p>
+          <a:p>
+            <a:pPr marL="0" marR="0" lvl="0" indent="0" algn="l" rtl="0">
+              <a:spcBef>
+                <a:spcPts val="0"/>
+              </a:spcBef>
+              <a:spcAft>
+                <a:spcPts val="0"/>
+              </a:spcAft>
+              <a:buNone/>
+            </a:pPr>
+            <a:r>
+              <a:rPr lang="en-US" sz="1600" b="0" u="none" dirty="0">
+                <a:solidFill>
+                  <a:schemeClr val="dk1"/>
+                </a:solidFill>
+                <a:latin typeface="Calibri"/>
+                <a:ea typeface="Calibri"/>
+                <a:cs typeface="Calibri"/>
+                <a:sym typeface="Calibri"/>
+              </a:rPr>
+              <a:t>statistical mechanics</a:t>
+            </a:r>
+            <a:endParaRPr sz="1600" dirty="0"/>
           </a:p>
         </p:txBody>
       </p:sp>
@@ -16033,7 +16060,7 @@
         </p:blipFill>
         <p:spPr>
           <a:xfrm>
-            <a:off x="2885527" y="3484341"/>
+            <a:off x="4157740" y="3079015"/>
             <a:ext cx="2859746" cy="696605"/>
           </a:xfrm>
           <a:prstGeom prst="rect">
@@ -16053,8 +16080,8 @@
         </p:nvSpPr>
         <p:spPr>
           <a:xfrm>
-            <a:off x="92833" y="4896225"/>
-            <a:ext cx="3765177" cy="1200329"/>
+            <a:off x="0" y="5337788"/>
+            <a:ext cx="4776825" cy="1200329"/>
           </a:xfrm>
           <a:prstGeom prst="rect">
             <a:avLst/>
@@ -16080,7 +16107,7 @@
               <a:buNone/>
             </a:pPr>
             <a:r>
-              <a:rPr lang="en-US" sz="1800" b="0" u="none">
+              <a:rPr lang="en-US" sz="1800" b="0" u="none" dirty="0">
                 <a:solidFill>
                   <a:schemeClr val="dk1"/>
                 </a:solidFill>
@@ -16092,7 +16119,7 @@
               <a:t>For energy-based models with latent variables </a:t>
             </a:r>
             <a:r>
-              <a:rPr lang="en-US" sz="1800" b="1" u="none">
+              <a:rPr lang="en-US" sz="1800" b="1" u="none" dirty="0">
                 <a:solidFill>
                   <a:srgbClr val="0070C0"/>
                 </a:solidFill>
@@ -16104,7 +16131,7 @@
               <a:t>h</a:t>
             </a:r>
             <a:r>
-              <a:rPr lang="en-US" sz="1800" b="0" u="none">
+              <a:rPr lang="en-US" sz="1800" b="0" u="none" dirty="0">
                 <a:solidFill>
                   <a:schemeClr val="dk1"/>
                 </a:solidFill>
@@ -16116,7 +16143,7 @@
               <a:t>, some algorithms are phrased in terms of the negative log - called the </a:t>
             </a:r>
             <a:r>
-              <a:rPr lang="en-US" sz="1800" b="1" u="none">
+              <a:rPr lang="en-US" sz="1800" b="1" u="none" dirty="0">
                 <a:solidFill>
                   <a:srgbClr val="0070C0"/>
                 </a:solidFill>
@@ -16128,7 +16155,7 @@
               <a:t>free energy</a:t>
             </a:r>
             <a:r>
-              <a:rPr lang="en-US" sz="1800" b="0" u="none">
+              <a:rPr lang="en-US" sz="1800" b="0" u="none" dirty="0">
                 <a:solidFill>
                   <a:schemeClr val="dk1"/>
                 </a:solidFill>
@@ -16139,7 +16166,7 @@
               </a:rPr>
               <a:t> :</a:t>
             </a:r>
-            <a:endParaRPr sz="1800" b="1" u="none">
+            <a:endParaRPr sz="1800" b="1" u="none" dirty="0">
               <a:solidFill>
                 <a:srgbClr val="0070C0"/>
               </a:solidFill>
@@ -16166,7 +16193,7 @@
         </p:blipFill>
         <p:spPr>
           <a:xfrm>
-            <a:off x="2859983" y="5972652"/>
+            <a:off x="3913636" y="6043161"/>
             <a:ext cx="3314700" cy="685800"/>
           </a:xfrm>
           <a:prstGeom prst="rect">
@@ -16198,7 +16225,7 @@
         </p:blipFill>
         <p:spPr>
           <a:xfrm>
-            <a:off x="6181214" y="2773538"/>
+            <a:off x="119046" y="2296041"/>
             <a:ext cx="1228846" cy="1421606"/>
           </a:xfrm>
           <a:prstGeom prst="rect">
@@ -16210,6 +16237,1664 @@
           </a:ln>
         </p:spPr>
       </p:pic>
+      <p:cxnSp>
+        <p:nvCxnSpPr>
+          <p:cNvPr id="3" name="Straight Arrow Connector 2">
+            <a:extLst>
+              <a:ext uri="{FF2B5EF4-FFF2-40B4-BE49-F238E27FC236}">
+                <a16:creationId xmlns:a16="http://schemas.microsoft.com/office/drawing/2014/main" id="{C571421E-1445-8143-950A-18C7590ED22C}"/>
+              </a:ext>
+            </a:extLst>
+          </p:cNvPr>
+          <p:cNvCxnSpPr>
+            <a:cxnSpLocks/>
+          </p:cNvCxnSpPr>
+          <p:nvPr/>
+        </p:nvCxnSpPr>
+        <p:spPr>
+          <a:xfrm flipV="1">
+            <a:off x="2663223" y="2400372"/>
+            <a:ext cx="0" cy="2316480"/>
+          </a:xfrm>
+          <a:prstGeom prst="straightConnector1">
+            <a:avLst/>
+          </a:prstGeom>
+          <a:ln w="50800">
+            <a:tailEnd type="stealth"/>
+          </a:ln>
+        </p:spPr>
+        <p:style>
+          <a:lnRef idx="1">
+            <a:schemeClr val="accent1"/>
+          </a:lnRef>
+          <a:fillRef idx="0">
+            <a:schemeClr val="accent1"/>
+          </a:fillRef>
+          <a:effectRef idx="0">
+            <a:schemeClr val="accent1"/>
+          </a:effectRef>
+          <a:fontRef idx="minor">
+            <a:schemeClr val="tx1"/>
+          </a:fontRef>
+        </p:style>
+      </p:cxnSp>
+      <p:sp>
+        <p:nvSpPr>
+          <p:cNvPr id="4" name="Oval 3">
+            <a:extLst>
+              <a:ext uri="{FF2B5EF4-FFF2-40B4-BE49-F238E27FC236}">
+                <a16:creationId xmlns:a16="http://schemas.microsoft.com/office/drawing/2014/main" id="{999318F0-88C9-C246-A14B-46954BB029D1}"/>
+              </a:ext>
+            </a:extLst>
+          </p:cNvPr>
+          <p:cNvSpPr/>
+          <p:nvPr/>
+        </p:nvSpPr>
+        <p:spPr>
+          <a:xfrm>
+            <a:off x="2731834" y="4383220"/>
+            <a:ext cx="86639" cy="86639"/>
+          </a:xfrm>
+          <a:prstGeom prst="ellipse">
+            <a:avLst/>
+          </a:prstGeom>
+        </p:spPr>
+        <p:style>
+          <a:lnRef idx="2">
+            <a:schemeClr val="accent1">
+              <a:shade val="50000"/>
+            </a:schemeClr>
+          </a:lnRef>
+          <a:fillRef idx="1">
+            <a:schemeClr val="accent1"/>
+          </a:fillRef>
+          <a:effectRef idx="0">
+            <a:schemeClr val="accent1"/>
+          </a:effectRef>
+          <a:fontRef idx="minor">
+            <a:schemeClr val="lt1"/>
+          </a:fontRef>
+        </p:style>
+        <p:txBody>
+          <a:bodyPr rtlCol="0" anchor="ctr"/>
+          <a:lstStyle/>
+          <a:p>
+            <a:pPr algn="ctr"/>
+            <a:endParaRPr lang="en-US"/>
+          </a:p>
+        </p:txBody>
+      </p:sp>
+      <p:sp>
+        <p:nvSpPr>
+          <p:cNvPr id="18" name="Oval 17">
+            <a:extLst>
+              <a:ext uri="{FF2B5EF4-FFF2-40B4-BE49-F238E27FC236}">
+                <a16:creationId xmlns:a16="http://schemas.microsoft.com/office/drawing/2014/main" id="{4CFD7BCE-8941-9A44-88B9-C82E3F223503}"/>
+              </a:ext>
+            </a:extLst>
+          </p:cNvPr>
+          <p:cNvSpPr/>
+          <p:nvPr/>
+        </p:nvSpPr>
+        <p:spPr>
+          <a:xfrm>
+            <a:off x="2849309" y="4383220"/>
+            <a:ext cx="86639" cy="86639"/>
+          </a:xfrm>
+          <a:prstGeom prst="ellipse">
+            <a:avLst/>
+          </a:prstGeom>
+        </p:spPr>
+        <p:style>
+          <a:lnRef idx="2">
+            <a:schemeClr val="accent1">
+              <a:shade val="50000"/>
+            </a:schemeClr>
+          </a:lnRef>
+          <a:fillRef idx="1">
+            <a:schemeClr val="accent1"/>
+          </a:fillRef>
+          <a:effectRef idx="0">
+            <a:schemeClr val="accent1"/>
+          </a:effectRef>
+          <a:fontRef idx="minor">
+            <a:schemeClr val="lt1"/>
+          </a:fontRef>
+        </p:style>
+        <p:txBody>
+          <a:bodyPr rtlCol="0" anchor="ctr"/>
+          <a:lstStyle/>
+          <a:p>
+            <a:pPr algn="ctr"/>
+            <a:endParaRPr lang="en-US"/>
+          </a:p>
+        </p:txBody>
+      </p:sp>
+      <p:sp>
+        <p:nvSpPr>
+          <p:cNvPr id="19" name="Oval 18">
+            <a:extLst>
+              <a:ext uri="{FF2B5EF4-FFF2-40B4-BE49-F238E27FC236}">
+                <a16:creationId xmlns:a16="http://schemas.microsoft.com/office/drawing/2014/main" id="{65E34984-44A8-E340-BC4F-8AAF6A2E850A}"/>
+              </a:ext>
+            </a:extLst>
+          </p:cNvPr>
+          <p:cNvSpPr/>
+          <p:nvPr/>
+        </p:nvSpPr>
+        <p:spPr>
+          <a:xfrm>
+            <a:off x="2966784" y="4383220"/>
+            <a:ext cx="86639" cy="86639"/>
+          </a:xfrm>
+          <a:prstGeom prst="ellipse">
+            <a:avLst/>
+          </a:prstGeom>
+        </p:spPr>
+        <p:style>
+          <a:lnRef idx="2">
+            <a:schemeClr val="accent1">
+              <a:shade val="50000"/>
+            </a:schemeClr>
+          </a:lnRef>
+          <a:fillRef idx="1">
+            <a:schemeClr val="accent1"/>
+          </a:fillRef>
+          <a:effectRef idx="0">
+            <a:schemeClr val="accent1"/>
+          </a:effectRef>
+          <a:fontRef idx="minor">
+            <a:schemeClr val="lt1"/>
+          </a:fontRef>
+        </p:style>
+        <p:txBody>
+          <a:bodyPr rtlCol="0" anchor="ctr"/>
+          <a:lstStyle/>
+          <a:p>
+            <a:pPr algn="ctr"/>
+            <a:endParaRPr lang="en-US"/>
+          </a:p>
+        </p:txBody>
+      </p:sp>
+      <p:sp>
+        <p:nvSpPr>
+          <p:cNvPr id="20" name="Oval 19">
+            <a:extLst>
+              <a:ext uri="{FF2B5EF4-FFF2-40B4-BE49-F238E27FC236}">
+                <a16:creationId xmlns:a16="http://schemas.microsoft.com/office/drawing/2014/main" id="{445E2A97-CD3F-6E46-9665-C0F176C28A95}"/>
+              </a:ext>
+            </a:extLst>
+          </p:cNvPr>
+          <p:cNvSpPr/>
+          <p:nvPr/>
+        </p:nvSpPr>
+        <p:spPr>
+          <a:xfrm>
+            <a:off x="3084259" y="4383220"/>
+            <a:ext cx="86639" cy="86639"/>
+          </a:xfrm>
+          <a:prstGeom prst="ellipse">
+            <a:avLst/>
+          </a:prstGeom>
+        </p:spPr>
+        <p:style>
+          <a:lnRef idx="2">
+            <a:schemeClr val="accent1">
+              <a:shade val="50000"/>
+            </a:schemeClr>
+          </a:lnRef>
+          <a:fillRef idx="1">
+            <a:schemeClr val="accent1"/>
+          </a:fillRef>
+          <a:effectRef idx="0">
+            <a:schemeClr val="accent1"/>
+          </a:effectRef>
+          <a:fontRef idx="minor">
+            <a:schemeClr val="lt1"/>
+          </a:fontRef>
+        </p:style>
+        <p:txBody>
+          <a:bodyPr rtlCol="0" anchor="ctr"/>
+          <a:lstStyle/>
+          <a:p>
+            <a:pPr algn="ctr"/>
+            <a:endParaRPr lang="en-US"/>
+          </a:p>
+        </p:txBody>
+      </p:sp>
+      <p:sp>
+        <p:nvSpPr>
+          <p:cNvPr id="21" name="Oval 20">
+            <a:extLst>
+              <a:ext uri="{FF2B5EF4-FFF2-40B4-BE49-F238E27FC236}">
+                <a16:creationId xmlns:a16="http://schemas.microsoft.com/office/drawing/2014/main" id="{6813EA5C-586D-0949-92AC-DE8C0D0EA909}"/>
+              </a:ext>
+            </a:extLst>
+          </p:cNvPr>
+          <p:cNvSpPr/>
+          <p:nvPr/>
+        </p:nvSpPr>
+        <p:spPr>
+          <a:xfrm>
+            <a:off x="3201734" y="4386395"/>
+            <a:ext cx="86639" cy="86639"/>
+          </a:xfrm>
+          <a:prstGeom prst="ellipse">
+            <a:avLst/>
+          </a:prstGeom>
+        </p:spPr>
+        <p:style>
+          <a:lnRef idx="2">
+            <a:schemeClr val="accent1">
+              <a:shade val="50000"/>
+            </a:schemeClr>
+          </a:lnRef>
+          <a:fillRef idx="1">
+            <a:schemeClr val="accent1"/>
+          </a:fillRef>
+          <a:effectRef idx="0">
+            <a:schemeClr val="accent1"/>
+          </a:effectRef>
+          <a:fontRef idx="minor">
+            <a:schemeClr val="lt1"/>
+          </a:fontRef>
+        </p:style>
+        <p:txBody>
+          <a:bodyPr rtlCol="0" anchor="ctr"/>
+          <a:lstStyle/>
+          <a:p>
+            <a:pPr algn="ctr"/>
+            <a:endParaRPr lang="en-US"/>
+          </a:p>
+        </p:txBody>
+      </p:sp>
+      <p:sp>
+        <p:nvSpPr>
+          <p:cNvPr id="22" name="Oval 21">
+            <a:extLst>
+              <a:ext uri="{FF2B5EF4-FFF2-40B4-BE49-F238E27FC236}">
+                <a16:creationId xmlns:a16="http://schemas.microsoft.com/office/drawing/2014/main" id="{5BA92778-6B69-1542-8F0A-FE5873433621}"/>
+              </a:ext>
+            </a:extLst>
+          </p:cNvPr>
+          <p:cNvSpPr/>
+          <p:nvPr/>
+        </p:nvSpPr>
+        <p:spPr>
+          <a:xfrm>
+            <a:off x="3319209" y="4386395"/>
+            <a:ext cx="86639" cy="86639"/>
+          </a:xfrm>
+          <a:prstGeom prst="ellipse">
+            <a:avLst/>
+          </a:prstGeom>
+        </p:spPr>
+        <p:style>
+          <a:lnRef idx="2">
+            <a:schemeClr val="accent1">
+              <a:shade val="50000"/>
+            </a:schemeClr>
+          </a:lnRef>
+          <a:fillRef idx="1">
+            <a:schemeClr val="accent1"/>
+          </a:fillRef>
+          <a:effectRef idx="0">
+            <a:schemeClr val="accent1"/>
+          </a:effectRef>
+          <a:fontRef idx="minor">
+            <a:schemeClr val="lt1"/>
+          </a:fontRef>
+        </p:style>
+        <p:txBody>
+          <a:bodyPr rtlCol="0" anchor="ctr"/>
+          <a:lstStyle/>
+          <a:p>
+            <a:pPr algn="ctr"/>
+            <a:endParaRPr lang="en-US"/>
+          </a:p>
+        </p:txBody>
+      </p:sp>
+      <p:sp>
+        <p:nvSpPr>
+          <p:cNvPr id="23" name="Oval 22">
+            <a:extLst>
+              <a:ext uri="{FF2B5EF4-FFF2-40B4-BE49-F238E27FC236}">
+                <a16:creationId xmlns:a16="http://schemas.microsoft.com/office/drawing/2014/main" id="{67FFC48C-A178-864B-B141-072B87979292}"/>
+              </a:ext>
+            </a:extLst>
+          </p:cNvPr>
+          <p:cNvSpPr/>
+          <p:nvPr/>
+        </p:nvSpPr>
+        <p:spPr>
+          <a:xfrm>
+            <a:off x="3436684" y="4386395"/>
+            <a:ext cx="86639" cy="86639"/>
+          </a:xfrm>
+          <a:prstGeom prst="ellipse">
+            <a:avLst/>
+          </a:prstGeom>
+        </p:spPr>
+        <p:style>
+          <a:lnRef idx="2">
+            <a:schemeClr val="accent1">
+              <a:shade val="50000"/>
+            </a:schemeClr>
+          </a:lnRef>
+          <a:fillRef idx="1">
+            <a:schemeClr val="accent1"/>
+          </a:fillRef>
+          <a:effectRef idx="0">
+            <a:schemeClr val="accent1"/>
+          </a:effectRef>
+          <a:fontRef idx="minor">
+            <a:schemeClr val="lt1"/>
+          </a:fontRef>
+        </p:style>
+        <p:txBody>
+          <a:bodyPr rtlCol="0" anchor="ctr"/>
+          <a:lstStyle/>
+          <a:p>
+            <a:pPr algn="ctr"/>
+            <a:endParaRPr lang="en-US"/>
+          </a:p>
+        </p:txBody>
+      </p:sp>
+      <p:sp>
+        <p:nvSpPr>
+          <p:cNvPr id="24" name="Oval 23">
+            <a:extLst>
+              <a:ext uri="{FF2B5EF4-FFF2-40B4-BE49-F238E27FC236}">
+                <a16:creationId xmlns:a16="http://schemas.microsoft.com/office/drawing/2014/main" id="{73581933-261C-8148-9E32-E5A0446B6B81}"/>
+              </a:ext>
+            </a:extLst>
+          </p:cNvPr>
+          <p:cNvSpPr/>
+          <p:nvPr/>
+        </p:nvSpPr>
+        <p:spPr>
+          <a:xfrm>
+            <a:off x="3554159" y="4386395"/>
+            <a:ext cx="86639" cy="86639"/>
+          </a:xfrm>
+          <a:prstGeom prst="ellipse">
+            <a:avLst/>
+          </a:prstGeom>
+        </p:spPr>
+        <p:style>
+          <a:lnRef idx="2">
+            <a:schemeClr val="accent1">
+              <a:shade val="50000"/>
+            </a:schemeClr>
+          </a:lnRef>
+          <a:fillRef idx="1">
+            <a:schemeClr val="accent1"/>
+          </a:fillRef>
+          <a:effectRef idx="0">
+            <a:schemeClr val="accent1"/>
+          </a:effectRef>
+          <a:fontRef idx="minor">
+            <a:schemeClr val="lt1"/>
+          </a:fontRef>
+        </p:style>
+        <p:txBody>
+          <a:bodyPr rtlCol="0" anchor="ctr"/>
+          <a:lstStyle/>
+          <a:p>
+            <a:pPr algn="ctr"/>
+            <a:endParaRPr lang="en-US"/>
+          </a:p>
+        </p:txBody>
+      </p:sp>
+      <p:sp>
+        <p:nvSpPr>
+          <p:cNvPr id="25" name="Oval 24">
+            <a:extLst>
+              <a:ext uri="{FF2B5EF4-FFF2-40B4-BE49-F238E27FC236}">
+                <a16:creationId xmlns:a16="http://schemas.microsoft.com/office/drawing/2014/main" id="{96106652-A95B-AB40-AD11-E58616BA0341}"/>
+              </a:ext>
+            </a:extLst>
+          </p:cNvPr>
+          <p:cNvSpPr/>
+          <p:nvPr/>
+        </p:nvSpPr>
+        <p:spPr>
+          <a:xfrm>
+            <a:off x="2731834" y="4002220"/>
+            <a:ext cx="86639" cy="86639"/>
+          </a:xfrm>
+          <a:prstGeom prst="ellipse">
+            <a:avLst/>
+          </a:prstGeom>
+        </p:spPr>
+        <p:style>
+          <a:lnRef idx="2">
+            <a:schemeClr val="accent1">
+              <a:shade val="50000"/>
+            </a:schemeClr>
+          </a:lnRef>
+          <a:fillRef idx="1">
+            <a:schemeClr val="accent1"/>
+          </a:fillRef>
+          <a:effectRef idx="0">
+            <a:schemeClr val="accent1"/>
+          </a:effectRef>
+          <a:fontRef idx="minor">
+            <a:schemeClr val="lt1"/>
+          </a:fontRef>
+        </p:style>
+        <p:txBody>
+          <a:bodyPr rtlCol="0" anchor="ctr"/>
+          <a:lstStyle/>
+          <a:p>
+            <a:pPr algn="ctr"/>
+            <a:endParaRPr lang="en-US"/>
+          </a:p>
+        </p:txBody>
+      </p:sp>
+      <p:sp>
+        <p:nvSpPr>
+          <p:cNvPr id="26" name="Oval 25">
+            <a:extLst>
+              <a:ext uri="{FF2B5EF4-FFF2-40B4-BE49-F238E27FC236}">
+                <a16:creationId xmlns:a16="http://schemas.microsoft.com/office/drawing/2014/main" id="{9128DCED-D563-0348-9573-830908EED614}"/>
+              </a:ext>
+            </a:extLst>
+          </p:cNvPr>
+          <p:cNvSpPr/>
+          <p:nvPr/>
+        </p:nvSpPr>
+        <p:spPr>
+          <a:xfrm>
+            <a:off x="2849309" y="4002220"/>
+            <a:ext cx="86639" cy="86639"/>
+          </a:xfrm>
+          <a:prstGeom prst="ellipse">
+            <a:avLst/>
+          </a:prstGeom>
+        </p:spPr>
+        <p:style>
+          <a:lnRef idx="2">
+            <a:schemeClr val="accent1">
+              <a:shade val="50000"/>
+            </a:schemeClr>
+          </a:lnRef>
+          <a:fillRef idx="1">
+            <a:schemeClr val="accent1"/>
+          </a:fillRef>
+          <a:effectRef idx="0">
+            <a:schemeClr val="accent1"/>
+          </a:effectRef>
+          <a:fontRef idx="minor">
+            <a:schemeClr val="lt1"/>
+          </a:fontRef>
+        </p:style>
+        <p:txBody>
+          <a:bodyPr rtlCol="0" anchor="ctr"/>
+          <a:lstStyle/>
+          <a:p>
+            <a:pPr algn="ctr"/>
+            <a:endParaRPr lang="en-US"/>
+          </a:p>
+        </p:txBody>
+      </p:sp>
+      <p:sp>
+        <p:nvSpPr>
+          <p:cNvPr id="27" name="Oval 26">
+            <a:extLst>
+              <a:ext uri="{FF2B5EF4-FFF2-40B4-BE49-F238E27FC236}">
+                <a16:creationId xmlns:a16="http://schemas.microsoft.com/office/drawing/2014/main" id="{B0863781-2C73-E740-BB23-28A04D28F93E}"/>
+              </a:ext>
+            </a:extLst>
+          </p:cNvPr>
+          <p:cNvSpPr/>
+          <p:nvPr/>
+        </p:nvSpPr>
+        <p:spPr>
+          <a:xfrm>
+            <a:off x="2966784" y="4002220"/>
+            <a:ext cx="86639" cy="86639"/>
+          </a:xfrm>
+          <a:prstGeom prst="ellipse">
+            <a:avLst/>
+          </a:prstGeom>
+        </p:spPr>
+        <p:style>
+          <a:lnRef idx="2">
+            <a:schemeClr val="accent1">
+              <a:shade val="50000"/>
+            </a:schemeClr>
+          </a:lnRef>
+          <a:fillRef idx="1">
+            <a:schemeClr val="accent1"/>
+          </a:fillRef>
+          <a:effectRef idx="0">
+            <a:schemeClr val="accent1"/>
+          </a:effectRef>
+          <a:fontRef idx="minor">
+            <a:schemeClr val="lt1"/>
+          </a:fontRef>
+        </p:style>
+        <p:txBody>
+          <a:bodyPr rtlCol="0" anchor="ctr"/>
+          <a:lstStyle/>
+          <a:p>
+            <a:pPr algn="ctr"/>
+            <a:endParaRPr lang="en-US"/>
+          </a:p>
+        </p:txBody>
+      </p:sp>
+      <p:sp>
+        <p:nvSpPr>
+          <p:cNvPr id="28" name="Oval 27">
+            <a:extLst>
+              <a:ext uri="{FF2B5EF4-FFF2-40B4-BE49-F238E27FC236}">
+                <a16:creationId xmlns:a16="http://schemas.microsoft.com/office/drawing/2014/main" id="{FF06A031-C290-EE45-B985-1374D0C1A8C3}"/>
+              </a:ext>
+            </a:extLst>
+          </p:cNvPr>
+          <p:cNvSpPr/>
+          <p:nvPr/>
+        </p:nvSpPr>
+        <p:spPr>
+          <a:xfrm>
+            <a:off x="3084259" y="4002220"/>
+            <a:ext cx="86639" cy="86639"/>
+          </a:xfrm>
+          <a:prstGeom prst="ellipse">
+            <a:avLst/>
+          </a:prstGeom>
+        </p:spPr>
+        <p:style>
+          <a:lnRef idx="2">
+            <a:schemeClr val="accent1">
+              <a:shade val="50000"/>
+            </a:schemeClr>
+          </a:lnRef>
+          <a:fillRef idx="1">
+            <a:schemeClr val="accent1"/>
+          </a:fillRef>
+          <a:effectRef idx="0">
+            <a:schemeClr val="accent1"/>
+          </a:effectRef>
+          <a:fontRef idx="minor">
+            <a:schemeClr val="lt1"/>
+          </a:fontRef>
+        </p:style>
+        <p:txBody>
+          <a:bodyPr rtlCol="0" anchor="ctr"/>
+          <a:lstStyle/>
+          <a:p>
+            <a:pPr algn="ctr"/>
+            <a:endParaRPr lang="en-US"/>
+          </a:p>
+        </p:txBody>
+      </p:sp>
+      <p:sp>
+        <p:nvSpPr>
+          <p:cNvPr id="29" name="Oval 28">
+            <a:extLst>
+              <a:ext uri="{FF2B5EF4-FFF2-40B4-BE49-F238E27FC236}">
+                <a16:creationId xmlns:a16="http://schemas.microsoft.com/office/drawing/2014/main" id="{8AA3E3F6-A784-E648-A6B3-33B334302506}"/>
+              </a:ext>
+            </a:extLst>
+          </p:cNvPr>
+          <p:cNvSpPr/>
+          <p:nvPr/>
+        </p:nvSpPr>
+        <p:spPr>
+          <a:xfrm>
+            <a:off x="2735009" y="3256095"/>
+            <a:ext cx="86639" cy="86639"/>
+          </a:xfrm>
+          <a:prstGeom prst="ellipse">
+            <a:avLst/>
+          </a:prstGeom>
+        </p:spPr>
+        <p:style>
+          <a:lnRef idx="2">
+            <a:schemeClr val="accent1">
+              <a:shade val="50000"/>
+            </a:schemeClr>
+          </a:lnRef>
+          <a:fillRef idx="1">
+            <a:schemeClr val="accent1"/>
+          </a:fillRef>
+          <a:effectRef idx="0">
+            <a:schemeClr val="accent1"/>
+          </a:effectRef>
+          <a:fontRef idx="minor">
+            <a:schemeClr val="lt1"/>
+          </a:fontRef>
+        </p:style>
+        <p:txBody>
+          <a:bodyPr rtlCol="0" anchor="ctr"/>
+          <a:lstStyle/>
+          <a:p>
+            <a:pPr algn="ctr"/>
+            <a:endParaRPr lang="en-US"/>
+          </a:p>
+        </p:txBody>
+      </p:sp>
+      <p:sp>
+        <p:nvSpPr>
+          <p:cNvPr id="30" name="Oval 29">
+            <a:extLst>
+              <a:ext uri="{FF2B5EF4-FFF2-40B4-BE49-F238E27FC236}">
+                <a16:creationId xmlns:a16="http://schemas.microsoft.com/office/drawing/2014/main" id="{14BE7A67-1CCF-4542-963D-9BEEE2DAA048}"/>
+              </a:ext>
+            </a:extLst>
+          </p:cNvPr>
+          <p:cNvSpPr/>
+          <p:nvPr/>
+        </p:nvSpPr>
+        <p:spPr>
+          <a:xfrm>
+            <a:off x="2852484" y="3256095"/>
+            <a:ext cx="86639" cy="86639"/>
+          </a:xfrm>
+          <a:prstGeom prst="ellipse">
+            <a:avLst/>
+          </a:prstGeom>
+        </p:spPr>
+        <p:style>
+          <a:lnRef idx="2">
+            <a:schemeClr val="accent1">
+              <a:shade val="50000"/>
+            </a:schemeClr>
+          </a:lnRef>
+          <a:fillRef idx="1">
+            <a:schemeClr val="accent1"/>
+          </a:fillRef>
+          <a:effectRef idx="0">
+            <a:schemeClr val="accent1"/>
+          </a:effectRef>
+          <a:fontRef idx="minor">
+            <a:schemeClr val="lt1"/>
+          </a:fontRef>
+        </p:style>
+        <p:txBody>
+          <a:bodyPr rtlCol="0" anchor="ctr"/>
+          <a:lstStyle/>
+          <a:p>
+            <a:pPr algn="ctr"/>
+            <a:endParaRPr lang="en-US"/>
+          </a:p>
+        </p:txBody>
+      </p:sp>
+      <p:sp>
+        <p:nvSpPr>
+          <p:cNvPr id="31" name="Oval 30">
+            <a:extLst>
+              <a:ext uri="{FF2B5EF4-FFF2-40B4-BE49-F238E27FC236}">
+                <a16:creationId xmlns:a16="http://schemas.microsoft.com/office/drawing/2014/main" id="{2C75464E-F303-2D4A-AB4A-9D477CD50D91}"/>
+              </a:ext>
+            </a:extLst>
+          </p:cNvPr>
+          <p:cNvSpPr/>
+          <p:nvPr/>
+        </p:nvSpPr>
+        <p:spPr>
+          <a:xfrm>
+            <a:off x="3665527" y="4388333"/>
+            <a:ext cx="86639" cy="86639"/>
+          </a:xfrm>
+          <a:prstGeom prst="ellipse">
+            <a:avLst/>
+          </a:prstGeom>
+        </p:spPr>
+        <p:style>
+          <a:lnRef idx="2">
+            <a:schemeClr val="accent1">
+              <a:shade val="50000"/>
+            </a:schemeClr>
+          </a:lnRef>
+          <a:fillRef idx="1">
+            <a:schemeClr val="accent1"/>
+          </a:fillRef>
+          <a:effectRef idx="0">
+            <a:schemeClr val="accent1"/>
+          </a:effectRef>
+          <a:fontRef idx="minor">
+            <a:schemeClr val="lt1"/>
+          </a:fontRef>
+        </p:style>
+        <p:txBody>
+          <a:bodyPr rtlCol="0" anchor="ctr"/>
+          <a:lstStyle/>
+          <a:p>
+            <a:pPr algn="ctr"/>
+            <a:endParaRPr lang="en-US"/>
+          </a:p>
+        </p:txBody>
+      </p:sp>
+      <p:sp>
+        <p:nvSpPr>
+          <p:cNvPr id="32" name="Oval 31">
+            <a:extLst>
+              <a:ext uri="{FF2B5EF4-FFF2-40B4-BE49-F238E27FC236}">
+                <a16:creationId xmlns:a16="http://schemas.microsoft.com/office/drawing/2014/main" id="{26FE2808-C072-CB4A-ABB6-79786A5E5698}"/>
+              </a:ext>
+            </a:extLst>
+          </p:cNvPr>
+          <p:cNvSpPr/>
+          <p:nvPr/>
+        </p:nvSpPr>
+        <p:spPr>
+          <a:xfrm>
+            <a:off x="3783002" y="4388333"/>
+            <a:ext cx="86639" cy="86639"/>
+          </a:xfrm>
+          <a:prstGeom prst="ellipse">
+            <a:avLst/>
+          </a:prstGeom>
+        </p:spPr>
+        <p:style>
+          <a:lnRef idx="2">
+            <a:schemeClr val="accent1">
+              <a:shade val="50000"/>
+            </a:schemeClr>
+          </a:lnRef>
+          <a:fillRef idx="1">
+            <a:schemeClr val="accent1"/>
+          </a:fillRef>
+          <a:effectRef idx="0">
+            <a:schemeClr val="accent1"/>
+          </a:effectRef>
+          <a:fontRef idx="minor">
+            <a:schemeClr val="lt1"/>
+          </a:fontRef>
+        </p:style>
+        <p:txBody>
+          <a:bodyPr rtlCol="0" anchor="ctr"/>
+          <a:lstStyle/>
+          <a:p>
+            <a:pPr algn="ctr"/>
+            <a:endParaRPr lang="en-US"/>
+          </a:p>
+        </p:txBody>
+      </p:sp>
+      <p:sp>
+        <p:nvSpPr>
+          <p:cNvPr id="33" name="Oval 32">
+            <a:extLst>
+              <a:ext uri="{FF2B5EF4-FFF2-40B4-BE49-F238E27FC236}">
+                <a16:creationId xmlns:a16="http://schemas.microsoft.com/office/drawing/2014/main" id="{C48C7EC6-9E2B-2849-A32D-73BC8F4CEDCF}"/>
+              </a:ext>
+            </a:extLst>
+          </p:cNvPr>
+          <p:cNvSpPr/>
+          <p:nvPr/>
+        </p:nvSpPr>
+        <p:spPr>
+          <a:xfrm>
+            <a:off x="3900477" y="4388333"/>
+            <a:ext cx="86639" cy="86639"/>
+          </a:xfrm>
+          <a:prstGeom prst="ellipse">
+            <a:avLst/>
+          </a:prstGeom>
+        </p:spPr>
+        <p:style>
+          <a:lnRef idx="2">
+            <a:schemeClr val="accent1">
+              <a:shade val="50000"/>
+            </a:schemeClr>
+          </a:lnRef>
+          <a:fillRef idx="1">
+            <a:schemeClr val="accent1"/>
+          </a:fillRef>
+          <a:effectRef idx="0">
+            <a:schemeClr val="accent1"/>
+          </a:effectRef>
+          <a:fontRef idx="minor">
+            <a:schemeClr val="lt1"/>
+          </a:fontRef>
+        </p:style>
+        <p:txBody>
+          <a:bodyPr rtlCol="0" anchor="ctr"/>
+          <a:lstStyle/>
+          <a:p>
+            <a:pPr algn="ctr"/>
+            <a:endParaRPr lang="en-US"/>
+          </a:p>
+        </p:txBody>
+      </p:sp>
+      <p:sp>
+        <p:nvSpPr>
+          <p:cNvPr id="34" name="Oval 33">
+            <a:extLst>
+              <a:ext uri="{FF2B5EF4-FFF2-40B4-BE49-F238E27FC236}">
+                <a16:creationId xmlns:a16="http://schemas.microsoft.com/office/drawing/2014/main" id="{FB0F8259-BEF5-1140-A725-B858D106CF1F}"/>
+              </a:ext>
+            </a:extLst>
+          </p:cNvPr>
+          <p:cNvSpPr/>
+          <p:nvPr/>
+        </p:nvSpPr>
+        <p:spPr>
+          <a:xfrm>
+            <a:off x="4017952" y="4388333"/>
+            <a:ext cx="86639" cy="86639"/>
+          </a:xfrm>
+          <a:prstGeom prst="ellipse">
+            <a:avLst/>
+          </a:prstGeom>
+        </p:spPr>
+        <p:style>
+          <a:lnRef idx="2">
+            <a:schemeClr val="accent1">
+              <a:shade val="50000"/>
+            </a:schemeClr>
+          </a:lnRef>
+          <a:fillRef idx="1">
+            <a:schemeClr val="accent1"/>
+          </a:fillRef>
+          <a:effectRef idx="0">
+            <a:schemeClr val="accent1"/>
+          </a:effectRef>
+          <a:fontRef idx="minor">
+            <a:schemeClr val="lt1"/>
+          </a:fontRef>
+        </p:style>
+        <p:txBody>
+          <a:bodyPr rtlCol="0" anchor="ctr"/>
+          <a:lstStyle/>
+          <a:p>
+            <a:pPr algn="ctr"/>
+            <a:endParaRPr lang="en-US"/>
+          </a:p>
+        </p:txBody>
+      </p:sp>
+      <p:sp>
+        <p:nvSpPr>
+          <p:cNvPr id="35" name="Oval 34">
+            <a:extLst>
+              <a:ext uri="{FF2B5EF4-FFF2-40B4-BE49-F238E27FC236}">
+                <a16:creationId xmlns:a16="http://schemas.microsoft.com/office/drawing/2014/main" id="{90127B40-A0A4-F949-BAB4-E2E9E0605662}"/>
+              </a:ext>
+            </a:extLst>
+          </p:cNvPr>
+          <p:cNvSpPr/>
+          <p:nvPr/>
+        </p:nvSpPr>
+        <p:spPr>
+          <a:xfrm>
+            <a:off x="4135427" y="4391508"/>
+            <a:ext cx="86639" cy="86639"/>
+          </a:xfrm>
+          <a:prstGeom prst="ellipse">
+            <a:avLst/>
+          </a:prstGeom>
+        </p:spPr>
+        <p:style>
+          <a:lnRef idx="2">
+            <a:schemeClr val="accent1">
+              <a:shade val="50000"/>
+            </a:schemeClr>
+          </a:lnRef>
+          <a:fillRef idx="1">
+            <a:schemeClr val="accent1"/>
+          </a:fillRef>
+          <a:effectRef idx="0">
+            <a:schemeClr val="accent1"/>
+          </a:effectRef>
+          <a:fontRef idx="minor">
+            <a:schemeClr val="lt1"/>
+          </a:fontRef>
+        </p:style>
+        <p:txBody>
+          <a:bodyPr rtlCol="0" anchor="ctr"/>
+          <a:lstStyle/>
+          <a:p>
+            <a:pPr algn="ctr"/>
+            <a:endParaRPr lang="en-US"/>
+          </a:p>
+        </p:txBody>
+      </p:sp>
+      <p:sp>
+        <p:nvSpPr>
+          <p:cNvPr id="36" name="Oval 35">
+            <a:extLst>
+              <a:ext uri="{FF2B5EF4-FFF2-40B4-BE49-F238E27FC236}">
+                <a16:creationId xmlns:a16="http://schemas.microsoft.com/office/drawing/2014/main" id="{702AA912-6324-9147-9DC0-8502A8EF0DA2}"/>
+              </a:ext>
+            </a:extLst>
+          </p:cNvPr>
+          <p:cNvSpPr/>
+          <p:nvPr/>
+        </p:nvSpPr>
+        <p:spPr>
+          <a:xfrm>
+            <a:off x="4252902" y="4391508"/>
+            <a:ext cx="86639" cy="86639"/>
+          </a:xfrm>
+          <a:prstGeom prst="ellipse">
+            <a:avLst/>
+          </a:prstGeom>
+        </p:spPr>
+        <p:style>
+          <a:lnRef idx="2">
+            <a:schemeClr val="accent1">
+              <a:shade val="50000"/>
+            </a:schemeClr>
+          </a:lnRef>
+          <a:fillRef idx="1">
+            <a:schemeClr val="accent1"/>
+          </a:fillRef>
+          <a:effectRef idx="0">
+            <a:schemeClr val="accent1"/>
+          </a:effectRef>
+          <a:fontRef idx="minor">
+            <a:schemeClr val="lt1"/>
+          </a:fontRef>
+        </p:style>
+        <p:txBody>
+          <a:bodyPr rtlCol="0" anchor="ctr"/>
+          <a:lstStyle/>
+          <a:p>
+            <a:pPr algn="ctr"/>
+            <a:endParaRPr lang="en-US"/>
+          </a:p>
+        </p:txBody>
+      </p:sp>
+      <p:sp>
+        <p:nvSpPr>
+          <p:cNvPr id="37" name="Oval 36">
+            <a:extLst>
+              <a:ext uri="{FF2B5EF4-FFF2-40B4-BE49-F238E27FC236}">
+                <a16:creationId xmlns:a16="http://schemas.microsoft.com/office/drawing/2014/main" id="{3F097163-8FFC-6548-9A7A-BFA85FFB7F42}"/>
+              </a:ext>
+            </a:extLst>
+          </p:cNvPr>
+          <p:cNvSpPr/>
+          <p:nvPr/>
+        </p:nvSpPr>
+        <p:spPr>
+          <a:xfrm>
+            <a:off x="4370377" y="4391508"/>
+            <a:ext cx="86639" cy="86639"/>
+          </a:xfrm>
+          <a:prstGeom prst="ellipse">
+            <a:avLst/>
+          </a:prstGeom>
+        </p:spPr>
+        <p:style>
+          <a:lnRef idx="2">
+            <a:schemeClr val="accent1">
+              <a:shade val="50000"/>
+            </a:schemeClr>
+          </a:lnRef>
+          <a:fillRef idx="1">
+            <a:schemeClr val="accent1"/>
+          </a:fillRef>
+          <a:effectRef idx="0">
+            <a:schemeClr val="accent1"/>
+          </a:effectRef>
+          <a:fontRef idx="minor">
+            <a:schemeClr val="lt1"/>
+          </a:fontRef>
+        </p:style>
+        <p:txBody>
+          <a:bodyPr rtlCol="0" anchor="ctr"/>
+          <a:lstStyle/>
+          <a:p>
+            <a:pPr algn="ctr"/>
+            <a:endParaRPr lang="en-US"/>
+          </a:p>
+        </p:txBody>
+      </p:sp>
+      <p:sp>
+        <p:nvSpPr>
+          <p:cNvPr id="38" name="Oval 37">
+            <a:extLst>
+              <a:ext uri="{FF2B5EF4-FFF2-40B4-BE49-F238E27FC236}">
+                <a16:creationId xmlns:a16="http://schemas.microsoft.com/office/drawing/2014/main" id="{02ACFA00-6421-1D4F-B448-E7A294B94E41}"/>
+              </a:ext>
+            </a:extLst>
+          </p:cNvPr>
+          <p:cNvSpPr/>
+          <p:nvPr/>
+        </p:nvSpPr>
+        <p:spPr>
+          <a:xfrm>
+            <a:off x="4487852" y="4391508"/>
+            <a:ext cx="86639" cy="86639"/>
+          </a:xfrm>
+          <a:prstGeom prst="ellipse">
+            <a:avLst/>
+          </a:prstGeom>
+        </p:spPr>
+        <p:style>
+          <a:lnRef idx="2">
+            <a:schemeClr val="accent1">
+              <a:shade val="50000"/>
+            </a:schemeClr>
+          </a:lnRef>
+          <a:fillRef idx="1">
+            <a:schemeClr val="accent1"/>
+          </a:fillRef>
+          <a:effectRef idx="0">
+            <a:schemeClr val="accent1"/>
+          </a:effectRef>
+          <a:fontRef idx="minor">
+            <a:schemeClr val="lt1"/>
+          </a:fontRef>
+        </p:style>
+        <p:txBody>
+          <a:bodyPr rtlCol="0" anchor="ctr"/>
+          <a:lstStyle/>
+          <a:p>
+            <a:pPr algn="ctr"/>
+            <a:endParaRPr lang="en-US"/>
+          </a:p>
+        </p:txBody>
+      </p:sp>
+      <p:sp>
+        <p:nvSpPr>
+          <p:cNvPr id="39" name="Oval 38">
+            <a:extLst>
+              <a:ext uri="{FF2B5EF4-FFF2-40B4-BE49-F238E27FC236}">
+                <a16:creationId xmlns:a16="http://schemas.microsoft.com/office/drawing/2014/main" id="{36D9BFEA-3608-964F-8755-E4816F567945}"/>
+              </a:ext>
+            </a:extLst>
+          </p:cNvPr>
+          <p:cNvSpPr/>
+          <p:nvPr/>
+        </p:nvSpPr>
+        <p:spPr>
+          <a:xfrm>
+            <a:off x="3201734" y="4002220"/>
+            <a:ext cx="86639" cy="86639"/>
+          </a:xfrm>
+          <a:prstGeom prst="ellipse">
+            <a:avLst/>
+          </a:prstGeom>
+        </p:spPr>
+        <p:style>
+          <a:lnRef idx="2">
+            <a:schemeClr val="accent1">
+              <a:shade val="50000"/>
+            </a:schemeClr>
+          </a:lnRef>
+          <a:fillRef idx="1">
+            <a:schemeClr val="accent1"/>
+          </a:fillRef>
+          <a:effectRef idx="0">
+            <a:schemeClr val="accent1"/>
+          </a:effectRef>
+          <a:fontRef idx="minor">
+            <a:schemeClr val="lt1"/>
+          </a:fontRef>
+        </p:style>
+        <p:txBody>
+          <a:bodyPr rtlCol="0" anchor="ctr"/>
+          <a:lstStyle/>
+          <a:p>
+            <a:pPr algn="ctr"/>
+            <a:endParaRPr lang="en-US"/>
+          </a:p>
+        </p:txBody>
+      </p:sp>
+      <p:sp>
+        <p:nvSpPr>
+          <p:cNvPr id="40" name="Oval 39">
+            <a:extLst>
+              <a:ext uri="{FF2B5EF4-FFF2-40B4-BE49-F238E27FC236}">
+                <a16:creationId xmlns:a16="http://schemas.microsoft.com/office/drawing/2014/main" id="{0F9F5240-3983-AB4E-8C00-B7F2DCF1F836}"/>
+              </a:ext>
+            </a:extLst>
+          </p:cNvPr>
+          <p:cNvSpPr/>
+          <p:nvPr/>
+        </p:nvSpPr>
+        <p:spPr>
+          <a:xfrm>
+            <a:off x="3319209" y="4002220"/>
+            <a:ext cx="86639" cy="86639"/>
+          </a:xfrm>
+          <a:prstGeom prst="ellipse">
+            <a:avLst/>
+          </a:prstGeom>
+        </p:spPr>
+        <p:style>
+          <a:lnRef idx="2">
+            <a:schemeClr val="accent1">
+              <a:shade val="50000"/>
+            </a:schemeClr>
+          </a:lnRef>
+          <a:fillRef idx="1">
+            <a:schemeClr val="accent1"/>
+          </a:fillRef>
+          <a:effectRef idx="0">
+            <a:schemeClr val="accent1"/>
+          </a:effectRef>
+          <a:fontRef idx="minor">
+            <a:schemeClr val="lt1"/>
+          </a:fontRef>
+        </p:style>
+        <p:txBody>
+          <a:bodyPr rtlCol="0" anchor="ctr"/>
+          <a:lstStyle/>
+          <a:p>
+            <a:pPr algn="ctr"/>
+            <a:endParaRPr lang="en-US"/>
+          </a:p>
+        </p:txBody>
+      </p:sp>
+      <p:sp>
+        <p:nvSpPr>
+          <p:cNvPr id="41" name="Oval 40">
+            <a:extLst>
+              <a:ext uri="{FF2B5EF4-FFF2-40B4-BE49-F238E27FC236}">
+                <a16:creationId xmlns:a16="http://schemas.microsoft.com/office/drawing/2014/main" id="{6886DD43-355B-3944-B9B7-F3FC62CBBF69}"/>
+              </a:ext>
+            </a:extLst>
+          </p:cNvPr>
+          <p:cNvSpPr/>
+          <p:nvPr/>
+        </p:nvSpPr>
+        <p:spPr>
+          <a:xfrm>
+            <a:off x="3436684" y="4002220"/>
+            <a:ext cx="86639" cy="86639"/>
+          </a:xfrm>
+          <a:prstGeom prst="ellipse">
+            <a:avLst/>
+          </a:prstGeom>
+        </p:spPr>
+        <p:style>
+          <a:lnRef idx="2">
+            <a:schemeClr val="accent1">
+              <a:shade val="50000"/>
+            </a:schemeClr>
+          </a:lnRef>
+          <a:fillRef idx="1">
+            <a:schemeClr val="accent1"/>
+          </a:fillRef>
+          <a:effectRef idx="0">
+            <a:schemeClr val="accent1"/>
+          </a:effectRef>
+          <a:fontRef idx="minor">
+            <a:schemeClr val="lt1"/>
+          </a:fontRef>
+        </p:style>
+        <p:txBody>
+          <a:bodyPr rtlCol="0" anchor="ctr"/>
+          <a:lstStyle/>
+          <a:p>
+            <a:pPr algn="ctr"/>
+            <a:endParaRPr lang="en-US"/>
+          </a:p>
+        </p:txBody>
+      </p:sp>
+      <p:sp>
+        <p:nvSpPr>
+          <p:cNvPr id="42" name="Oval 41">
+            <a:extLst>
+              <a:ext uri="{FF2B5EF4-FFF2-40B4-BE49-F238E27FC236}">
+                <a16:creationId xmlns:a16="http://schemas.microsoft.com/office/drawing/2014/main" id="{54F9C01D-7C56-5848-9BB5-FB686D9724DC}"/>
+              </a:ext>
+            </a:extLst>
+          </p:cNvPr>
+          <p:cNvSpPr/>
+          <p:nvPr/>
+        </p:nvSpPr>
+        <p:spPr>
+          <a:xfrm>
+            <a:off x="3554159" y="4002220"/>
+            <a:ext cx="86639" cy="86639"/>
+          </a:xfrm>
+          <a:prstGeom prst="ellipse">
+            <a:avLst/>
+          </a:prstGeom>
+        </p:spPr>
+        <p:style>
+          <a:lnRef idx="2">
+            <a:schemeClr val="accent1">
+              <a:shade val="50000"/>
+            </a:schemeClr>
+          </a:lnRef>
+          <a:fillRef idx="1">
+            <a:schemeClr val="accent1"/>
+          </a:fillRef>
+          <a:effectRef idx="0">
+            <a:schemeClr val="accent1"/>
+          </a:effectRef>
+          <a:fontRef idx="minor">
+            <a:schemeClr val="lt1"/>
+          </a:fontRef>
+        </p:style>
+        <p:txBody>
+          <a:bodyPr rtlCol="0" anchor="ctr"/>
+          <a:lstStyle/>
+          <a:p>
+            <a:pPr algn="ctr"/>
+            <a:endParaRPr lang="en-US"/>
+          </a:p>
+        </p:txBody>
+      </p:sp>
+      <p:sp>
+        <p:nvSpPr>
+          <p:cNvPr id="43" name="Oval 42">
+            <a:extLst>
+              <a:ext uri="{FF2B5EF4-FFF2-40B4-BE49-F238E27FC236}">
+                <a16:creationId xmlns:a16="http://schemas.microsoft.com/office/drawing/2014/main" id="{F2086008-5178-A445-8CB4-F0815C755894}"/>
+              </a:ext>
+            </a:extLst>
+          </p:cNvPr>
+          <p:cNvSpPr/>
+          <p:nvPr/>
+        </p:nvSpPr>
+        <p:spPr>
+          <a:xfrm>
+            <a:off x="2735009" y="3618045"/>
+            <a:ext cx="86639" cy="86639"/>
+          </a:xfrm>
+          <a:prstGeom prst="ellipse">
+            <a:avLst/>
+          </a:prstGeom>
+        </p:spPr>
+        <p:style>
+          <a:lnRef idx="2">
+            <a:schemeClr val="accent1">
+              <a:shade val="50000"/>
+            </a:schemeClr>
+          </a:lnRef>
+          <a:fillRef idx="1">
+            <a:schemeClr val="accent1"/>
+          </a:fillRef>
+          <a:effectRef idx="0">
+            <a:schemeClr val="accent1"/>
+          </a:effectRef>
+          <a:fontRef idx="minor">
+            <a:schemeClr val="lt1"/>
+          </a:fontRef>
+        </p:style>
+        <p:txBody>
+          <a:bodyPr rtlCol="0" anchor="ctr"/>
+          <a:lstStyle/>
+          <a:p>
+            <a:pPr algn="ctr"/>
+            <a:endParaRPr lang="en-US"/>
+          </a:p>
+        </p:txBody>
+      </p:sp>
+      <p:sp>
+        <p:nvSpPr>
+          <p:cNvPr id="44" name="Oval 43">
+            <a:extLst>
+              <a:ext uri="{FF2B5EF4-FFF2-40B4-BE49-F238E27FC236}">
+                <a16:creationId xmlns:a16="http://schemas.microsoft.com/office/drawing/2014/main" id="{F6806380-E7A8-D14D-BEAC-FEEABD805E7A}"/>
+              </a:ext>
+            </a:extLst>
+          </p:cNvPr>
+          <p:cNvSpPr/>
+          <p:nvPr/>
+        </p:nvSpPr>
+        <p:spPr>
+          <a:xfrm>
+            <a:off x="2852484" y="3618045"/>
+            <a:ext cx="86639" cy="86639"/>
+          </a:xfrm>
+          <a:prstGeom prst="ellipse">
+            <a:avLst/>
+          </a:prstGeom>
+        </p:spPr>
+        <p:style>
+          <a:lnRef idx="2">
+            <a:schemeClr val="accent1">
+              <a:shade val="50000"/>
+            </a:schemeClr>
+          </a:lnRef>
+          <a:fillRef idx="1">
+            <a:schemeClr val="accent1"/>
+          </a:fillRef>
+          <a:effectRef idx="0">
+            <a:schemeClr val="accent1"/>
+          </a:effectRef>
+          <a:fontRef idx="minor">
+            <a:schemeClr val="lt1"/>
+          </a:fontRef>
+        </p:style>
+        <p:txBody>
+          <a:bodyPr rtlCol="0" anchor="ctr"/>
+          <a:lstStyle/>
+          <a:p>
+            <a:pPr algn="ctr"/>
+            <a:endParaRPr lang="en-US"/>
+          </a:p>
+        </p:txBody>
+      </p:sp>
+      <p:sp>
+        <p:nvSpPr>
+          <p:cNvPr id="45" name="Oval 44">
+            <a:extLst>
+              <a:ext uri="{FF2B5EF4-FFF2-40B4-BE49-F238E27FC236}">
+                <a16:creationId xmlns:a16="http://schemas.microsoft.com/office/drawing/2014/main" id="{5784249F-A535-D848-BD40-FD5D482418AD}"/>
+              </a:ext>
+            </a:extLst>
+          </p:cNvPr>
+          <p:cNvSpPr/>
+          <p:nvPr/>
+        </p:nvSpPr>
+        <p:spPr>
+          <a:xfrm>
+            <a:off x="2969959" y="3618045"/>
+            <a:ext cx="86639" cy="86639"/>
+          </a:xfrm>
+          <a:prstGeom prst="ellipse">
+            <a:avLst/>
+          </a:prstGeom>
+        </p:spPr>
+        <p:style>
+          <a:lnRef idx="2">
+            <a:schemeClr val="accent1">
+              <a:shade val="50000"/>
+            </a:schemeClr>
+          </a:lnRef>
+          <a:fillRef idx="1">
+            <a:schemeClr val="accent1"/>
+          </a:fillRef>
+          <a:effectRef idx="0">
+            <a:schemeClr val="accent1"/>
+          </a:effectRef>
+          <a:fontRef idx="minor">
+            <a:schemeClr val="lt1"/>
+          </a:fontRef>
+        </p:style>
+        <p:txBody>
+          <a:bodyPr rtlCol="0" anchor="ctr"/>
+          <a:lstStyle/>
+          <a:p>
+            <a:pPr algn="ctr"/>
+            <a:endParaRPr lang="en-US"/>
+          </a:p>
+        </p:txBody>
+      </p:sp>
+      <p:sp>
+        <p:nvSpPr>
+          <p:cNvPr id="46" name="Oval 45">
+            <a:extLst>
+              <a:ext uri="{FF2B5EF4-FFF2-40B4-BE49-F238E27FC236}">
+                <a16:creationId xmlns:a16="http://schemas.microsoft.com/office/drawing/2014/main" id="{DE419B30-A63E-F743-A3AC-20D48E142FB6}"/>
+              </a:ext>
+            </a:extLst>
+          </p:cNvPr>
+          <p:cNvSpPr/>
+          <p:nvPr/>
+        </p:nvSpPr>
+        <p:spPr>
+          <a:xfrm>
+            <a:off x="3087434" y="3618045"/>
+            <a:ext cx="86639" cy="86639"/>
+          </a:xfrm>
+          <a:prstGeom prst="ellipse">
+            <a:avLst/>
+          </a:prstGeom>
+        </p:spPr>
+        <p:style>
+          <a:lnRef idx="2">
+            <a:schemeClr val="accent1">
+              <a:shade val="50000"/>
+            </a:schemeClr>
+          </a:lnRef>
+          <a:fillRef idx="1">
+            <a:schemeClr val="accent1"/>
+          </a:fillRef>
+          <a:effectRef idx="0">
+            <a:schemeClr val="accent1"/>
+          </a:effectRef>
+          <a:fontRef idx="minor">
+            <a:schemeClr val="lt1"/>
+          </a:fontRef>
+        </p:style>
+        <p:txBody>
+          <a:bodyPr rtlCol="0" anchor="ctr"/>
+          <a:lstStyle/>
+          <a:p>
+            <a:pPr algn="ctr"/>
+            <a:endParaRPr lang="en-US"/>
+          </a:p>
+        </p:txBody>
+      </p:sp>
+      <p:sp>
+        <p:nvSpPr>
+          <p:cNvPr id="47" name="Oval 46">
+            <a:extLst>
+              <a:ext uri="{FF2B5EF4-FFF2-40B4-BE49-F238E27FC236}">
+                <a16:creationId xmlns:a16="http://schemas.microsoft.com/office/drawing/2014/main" id="{D6CA8484-57BA-014A-BED2-E7C0FCA9A513}"/>
+              </a:ext>
+            </a:extLst>
+          </p:cNvPr>
+          <p:cNvSpPr/>
+          <p:nvPr/>
+        </p:nvSpPr>
+        <p:spPr>
+          <a:xfrm>
+            <a:off x="2720852" y="2852613"/>
+            <a:ext cx="86639" cy="86639"/>
+          </a:xfrm>
+          <a:prstGeom prst="ellipse">
+            <a:avLst/>
+          </a:prstGeom>
+        </p:spPr>
+        <p:style>
+          <a:lnRef idx="2">
+            <a:schemeClr val="accent1">
+              <a:shade val="50000"/>
+            </a:schemeClr>
+          </a:lnRef>
+          <a:fillRef idx="1">
+            <a:schemeClr val="accent1"/>
+          </a:fillRef>
+          <a:effectRef idx="0">
+            <a:schemeClr val="accent1"/>
+          </a:effectRef>
+          <a:fontRef idx="minor">
+            <a:schemeClr val="lt1"/>
+          </a:fontRef>
+        </p:style>
+        <p:txBody>
+          <a:bodyPr rtlCol="0" anchor="ctr"/>
+          <a:lstStyle/>
+          <a:p>
+            <a:pPr algn="ctr"/>
+            <a:endParaRPr lang="en-US"/>
+          </a:p>
+        </p:txBody>
+      </p:sp>
+      <p:sp>
+        <p:nvSpPr>
+          <p:cNvPr id="5" name="TextBox 4">
+            <a:extLst>
+              <a:ext uri="{FF2B5EF4-FFF2-40B4-BE49-F238E27FC236}">
+                <a16:creationId xmlns:a16="http://schemas.microsoft.com/office/drawing/2014/main" id="{E52D1B25-540C-484F-8A43-549DCCF3291C}"/>
+              </a:ext>
+            </a:extLst>
+          </p:cNvPr>
+          <p:cNvSpPr txBox="1"/>
+          <p:nvPr/>
+        </p:nvSpPr>
+        <p:spPr>
+          <a:xfrm>
+            <a:off x="3418798" y="2753173"/>
+            <a:ext cx="4102679" cy="369332"/>
+          </a:xfrm>
+          <a:prstGeom prst="rect">
+            <a:avLst/>
+          </a:prstGeom>
+          <a:noFill/>
+        </p:spPr>
+        <p:txBody>
+          <a:bodyPr wrap="square" rtlCol="0">
+            <a:spAutoFit/>
+          </a:bodyPr>
+          <a:lstStyle/>
+          <a:p>
+            <a:r>
+              <a:rPr lang="en-US" sz="1800" dirty="0"/>
+              <a:t>Gibbs’ exponential energy distribution</a:t>
+            </a:r>
+          </a:p>
+        </p:txBody>
+      </p:sp>
+      <p:cxnSp>
+        <p:nvCxnSpPr>
+          <p:cNvPr id="51" name="Google Shape;92;p13">
+            <a:extLst>
+              <a:ext uri="{FF2B5EF4-FFF2-40B4-BE49-F238E27FC236}">
+                <a16:creationId xmlns:a16="http://schemas.microsoft.com/office/drawing/2014/main" id="{7BA09B12-3E5D-CA41-B0E7-E9D02E892326}"/>
+              </a:ext>
+            </a:extLst>
+          </p:cNvPr>
+          <p:cNvCxnSpPr>
+            <a:cxnSpLocks/>
+          </p:cNvCxnSpPr>
+          <p:nvPr/>
+        </p:nvCxnSpPr>
+        <p:spPr>
+          <a:xfrm>
+            <a:off x="7618378" y="4314568"/>
+            <a:ext cx="4421222" cy="0"/>
+          </a:xfrm>
+          <a:prstGeom prst="straightConnector1">
+            <a:avLst/>
+          </a:prstGeom>
+          <a:noFill/>
+          <a:ln w="9525" cap="flat" cmpd="sng">
+            <a:solidFill>
+              <a:schemeClr val="accent1"/>
+            </a:solidFill>
+            <a:prstDash val="solid"/>
+            <a:miter lim="800000"/>
+            <a:headEnd type="none" w="sm" len="sm"/>
+            <a:tailEnd type="none" w="sm" len="sm"/>
+          </a:ln>
+        </p:spPr>
+      </p:cxnSp>
+      <p:pic>
+        <p:nvPicPr>
+          <p:cNvPr id="11" name="Picture 10">
+            <a:extLst>
+              <a:ext uri="{FF2B5EF4-FFF2-40B4-BE49-F238E27FC236}">
+                <a16:creationId xmlns:a16="http://schemas.microsoft.com/office/drawing/2014/main" id="{D4984FAC-7C70-7245-A92D-0806354AE409}"/>
+              </a:ext>
+            </a:extLst>
+          </p:cNvPr>
+          <p:cNvPicPr>
+            <a:picLocks noChangeAspect="1"/>
+          </p:cNvPicPr>
+          <p:nvPr/>
+        </p:nvPicPr>
+        <p:blipFill>
+          <a:blip r:embed="rId10" cstate="email">
+            <a:extLst>
+              <a:ext uri="{28A0092B-C50C-407E-A947-70E740481C1C}">
+                <a14:useLocalDpi xmlns:a14="http://schemas.microsoft.com/office/drawing/2010/main"/>
+              </a:ext>
+            </a:extLst>
+          </a:blip>
+          <a:stretch>
+            <a:fillRect/>
+          </a:stretch>
+        </p:blipFill>
+        <p:spPr>
+          <a:xfrm>
+            <a:off x="8113232" y="5071833"/>
+            <a:ext cx="3648818" cy="1765557"/>
+          </a:xfrm>
+          <a:prstGeom prst="rect">
+            <a:avLst/>
+          </a:prstGeom>
+        </p:spPr>
+      </p:pic>
+      <p:sp>
+        <p:nvSpPr>
+          <p:cNvPr id="12" name="TextBox 11">
+            <a:extLst>
+              <a:ext uri="{FF2B5EF4-FFF2-40B4-BE49-F238E27FC236}">
+                <a16:creationId xmlns:a16="http://schemas.microsoft.com/office/drawing/2014/main" id="{D560C06B-733A-2E49-A0A9-D016550514C4}"/>
+              </a:ext>
+            </a:extLst>
+          </p:cNvPr>
+          <p:cNvSpPr txBox="1"/>
+          <p:nvPr/>
+        </p:nvSpPr>
+        <p:spPr>
+          <a:xfrm>
+            <a:off x="7630106" y="4401207"/>
+            <a:ext cx="4409494" cy="646331"/>
+          </a:xfrm>
+          <a:prstGeom prst="rect">
+            <a:avLst/>
+          </a:prstGeom>
+          <a:noFill/>
+        </p:spPr>
+        <p:txBody>
+          <a:bodyPr wrap="square" rtlCol="0">
+            <a:spAutoFit/>
+          </a:bodyPr>
+          <a:lstStyle/>
+          <a:p>
+            <a:r>
+              <a:rPr lang="en-US" sz="1800" b="1" dirty="0">
+                <a:solidFill>
+                  <a:srgbClr val="FF0000"/>
+                </a:solidFill>
+              </a:rPr>
+              <a:t>Deep Belief Network </a:t>
+            </a:r>
+            <a:r>
+              <a:rPr lang="en-US" sz="1800" dirty="0"/>
+              <a:t>- training a deep network - one RBM layer at a time </a:t>
+            </a:r>
+          </a:p>
+        </p:txBody>
+      </p:sp>
+      <p:sp>
+        <p:nvSpPr>
+          <p:cNvPr id="2" name="TextBox 1">
+            <a:extLst>
+              <a:ext uri="{FF2B5EF4-FFF2-40B4-BE49-F238E27FC236}">
+                <a16:creationId xmlns:a16="http://schemas.microsoft.com/office/drawing/2014/main" id="{8187A277-141C-954C-A0CC-0BAD15B9601A}"/>
+              </a:ext>
+            </a:extLst>
+          </p:cNvPr>
+          <p:cNvSpPr txBox="1"/>
+          <p:nvPr/>
+        </p:nvSpPr>
+        <p:spPr>
+          <a:xfrm>
+            <a:off x="2725787" y="2201328"/>
+            <a:ext cx="513220" cy="400110"/>
+          </a:xfrm>
+          <a:prstGeom prst="rect">
+            <a:avLst/>
+          </a:prstGeom>
+          <a:noFill/>
+        </p:spPr>
+        <p:txBody>
+          <a:bodyPr wrap="square" rtlCol="0">
+            <a:spAutoFit/>
+          </a:bodyPr>
+          <a:lstStyle/>
+          <a:p>
+            <a:r>
+              <a:rPr lang="en-US" sz="2000" b="1" dirty="0">
+                <a:solidFill>
+                  <a:schemeClr val="accent1">
+                    <a:lumMod val="75000"/>
+                  </a:schemeClr>
+                </a:solidFill>
+                <a:latin typeface="Times New Roman" panose="02020603050405020304" pitchFamily="18" charset="0"/>
+                <a:cs typeface="Times New Roman" panose="02020603050405020304" pitchFamily="18" charset="0"/>
+              </a:rPr>
+              <a:t>E</a:t>
+            </a:r>
+          </a:p>
+        </p:txBody>
+      </p:sp>
     </p:spTree>
   </p:cSld>
   <p:clrMapOvr>
